--- a/brand/KODA-deck-FR.pptx
+++ b/brand/KODA-deck-FR.pptx
@@ -3328,7 +3328,7 @@
                 <a:ea typeface="Calibri" pitchFamily="34" charset="-122"/>
                 <a:cs typeface="Calibri" pitchFamily="34" charset="-120"/>
               </a:rPr>
-              <a:t>190 vérifs / mois</a:t>
+              <a:t>100 vérifs / mois</a:t>
             </a:r>
             <a:endParaRPr lang="en-US" sz="1000" dirty="0"/>
           </a:p>
@@ -3506,7 +3506,7 @@
                 <a:ea typeface="Calibri" pitchFamily="34" charset="-122"/>
                 <a:cs typeface="Calibri" pitchFamily="34" charset="-120"/>
               </a:rPr>
-              <a:t>760 vérifs / mois</a:t>
+              <a:t>400 vérifs / mois</a:t>
             </a:r>
             <a:endParaRPr lang="en-US" sz="1000" dirty="0"/>
           </a:p>
@@ -3660,7 +3660,7 @@
                 <a:ea typeface="Calibri" pitchFamily="34" charset="-122"/>
                 <a:cs typeface="Calibri" pitchFamily="34" charset="-120"/>
               </a:rPr>
-              <a:t>3 800 / mois</a:t>
+              <a:t>2 000 / mois</a:t>
             </a:r>
             <a:endParaRPr lang="en-US" sz="1000" dirty="0"/>
           </a:p>
@@ -3772,7 +3772,7 @@
                 <a:ea typeface="Arial" pitchFamily="34" charset="-122"/>
                 <a:cs typeface="Arial" pitchFamily="34" charset="-120"/>
               </a:rPr>
-              <a:t>$399</a:t>
+              <a:t>$400</a:t>
             </a:r>
             <a:endParaRPr lang="en-US" sz="2700" dirty="0"/>
           </a:p>
@@ -3814,7 +3814,7 @@
                 <a:ea typeface="Calibri" pitchFamily="34" charset="-122"/>
                 <a:cs typeface="Calibri" pitchFamily="34" charset="-120"/>
               </a:rPr>
-              <a:t>15 200 / mois</a:t>
+              <a:t>8 000 / mois</a:t>
             </a:r>
             <a:endParaRPr lang="en-US" sz="1000" dirty="0"/>
           </a:p>

--- a/brand/KODA-deck-FR.pptx
+++ b/brand/KODA-deck-FR.pptx
@@ -3286,7 +3286,7 @@
                 <a:ea typeface="Arial" pitchFamily="34" charset="-122"/>
                 <a:cs typeface="Arial" pitchFamily="34" charset="-120"/>
               </a:rPr>
-              <a:t>$5</a:t>
+              <a:t>$6</a:t>
             </a:r>
             <a:endParaRPr lang="en-US" sz="2700" dirty="0"/>
           </a:p>
@@ -3328,7 +3328,7 @@
                 <a:ea typeface="Calibri" pitchFamily="34" charset="-122"/>
                 <a:cs typeface="Calibri" pitchFamily="34" charset="-120"/>
               </a:rPr>
-              <a:t>100 vérifs / mois</a:t>
+              <a:t>100 / mois · $0.06</a:t>
             </a:r>
             <a:endParaRPr lang="en-US" sz="1000" dirty="0"/>
           </a:p>
@@ -3464,7 +3464,7 @@
                 <a:ea typeface="Arial" pitchFamily="34" charset="-122"/>
                 <a:cs typeface="Arial" pitchFamily="34" charset="-120"/>
               </a:rPr>
-              <a:t>$20</a:t>
+              <a:t>$22</a:t>
             </a:r>
             <a:endParaRPr lang="en-US" sz="2700" dirty="0"/>
           </a:p>
@@ -3506,7 +3506,7 @@
                 <a:ea typeface="Calibri" pitchFamily="34" charset="-122"/>
                 <a:cs typeface="Calibri" pitchFamily="34" charset="-120"/>
               </a:rPr>
-              <a:t>400 vérifs / mois</a:t>
+              <a:t>400 / mois · $0.055</a:t>
             </a:r>
             <a:endParaRPr lang="en-US" sz="1000" dirty="0"/>
           </a:p>
@@ -3618,7 +3618,7 @@
                 <a:ea typeface="Arial" pitchFamily="34" charset="-122"/>
                 <a:cs typeface="Arial" pitchFamily="34" charset="-120"/>
               </a:rPr>
-              <a:t>$100</a:t>
+              <a:t>$105</a:t>
             </a:r>
             <a:endParaRPr lang="en-US" sz="2700" dirty="0"/>
           </a:p>
@@ -3660,7 +3660,7 @@
                 <a:ea typeface="Calibri" pitchFamily="34" charset="-122"/>
                 <a:cs typeface="Calibri" pitchFamily="34" charset="-120"/>
               </a:rPr>
-              <a:t>2 000 / mois</a:t>
+              <a:t>2 000 / mois · $0.0525</a:t>
             </a:r>
             <a:endParaRPr lang="en-US" sz="1000" dirty="0"/>
           </a:p>
@@ -3814,7 +3814,7 @@
                 <a:ea typeface="Calibri" pitchFamily="34" charset="-122"/>
                 <a:cs typeface="Calibri" pitchFamily="34" charset="-120"/>
               </a:rPr>
-              <a:t>8 000 / mois</a:t>
+              <a:t>8 000 / mois · $0.05</a:t>
             </a:r>
             <a:endParaRPr lang="en-US" sz="1000" dirty="0"/>
           </a:p>

--- a/brand/KODA-deck-FR.pptx
+++ b/brand/KODA-deck-FR.pptx
@@ -3286,7 +3286,7 @@
                 <a:ea typeface="Arial" pitchFamily="34" charset="-122"/>
                 <a:cs typeface="Arial" pitchFamily="34" charset="-120"/>
               </a:rPr>
-              <a:t>$6</a:t>
+              <a:t>$5</a:t>
             </a:r>
             <a:endParaRPr lang="en-US" sz="2700" dirty="0"/>
           </a:p>
@@ -3328,7 +3328,7 @@
                 <a:ea typeface="Calibri" pitchFamily="34" charset="-122"/>
                 <a:cs typeface="Calibri" pitchFamily="34" charset="-120"/>
               </a:rPr>
-              <a:t>100 / mois · $0.06</a:t>
+              <a:t>85 / mois · $0.0588</a:t>
             </a:r>
             <a:endParaRPr lang="en-US" sz="1000" dirty="0"/>
           </a:p>
@@ -3464,7 +3464,7 @@
                 <a:ea typeface="Arial" pitchFamily="34" charset="-122"/>
                 <a:cs typeface="Arial" pitchFamily="34" charset="-120"/>
               </a:rPr>
-              <a:t>$22</a:t>
+              <a:t>$20</a:t>
             </a:r>
             <a:endParaRPr lang="en-US" sz="2700" dirty="0"/>
           </a:p>
@@ -3506,7 +3506,7 @@
                 <a:ea typeface="Calibri" pitchFamily="34" charset="-122"/>
                 <a:cs typeface="Calibri" pitchFamily="34" charset="-120"/>
               </a:rPr>
-              <a:t>400 / mois · $0.055</a:t>
+              <a:t>360 / mois · $0.0556</a:t>
             </a:r>
             <a:endParaRPr lang="en-US" sz="1000" dirty="0"/>
           </a:p>
@@ -3618,7 +3618,7 @@
                 <a:ea typeface="Arial" pitchFamily="34" charset="-122"/>
                 <a:cs typeface="Arial" pitchFamily="34" charset="-120"/>
               </a:rPr>
-              <a:t>$105</a:t>
+              <a:t>$100</a:t>
             </a:r>
             <a:endParaRPr lang="en-US" sz="2700" dirty="0"/>
           </a:p>
@@ -3660,7 +3660,7 @@
                 <a:ea typeface="Calibri" pitchFamily="34" charset="-122"/>
                 <a:cs typeface="Calibri" pitchFamily="34" charset="-120"/>
               </a:rPr>
-              <a:t>2 000 / mois · $0.0525</a:t>
+              <a:t>1 900 / mois · $0.0526</a:t>
             </a:r>
             <a:endParaRPr lang="en-US" sz="1000" dirty="0"/>
           </a:p>
